--- a/slides/Week5.pptx
+++ b/slides/Week5.pptx
@@ -207,6 +207,7 @@
 <p1510:revInfo xmlns:a="http://schemas.openxmlformats.org/drawingml/2006/main" xmlns:r="http://schemas.openxmlformats.org/officeDocument/2006/relationships" xmlns:p1510="http://schemas.microsoft.com/office/powerpoint/2015/10/main">
   <p1510:revLst>
     <p1510:client id="{54AB0866-7968-4D34-8971-E2315E8CF226}" v="80" dt="2026-02-10T01:26:04.485"/>
+    <p1510:client id="{6876CDB2-C50D-4F5A-AB73-98725D608AA5}" v="2" dt="2026-02-10T04:00:37.195"/>
     <p1510:client id="{94CB60BB-36FB-41BF-B16C-C75307E0CFA3}" v="663" dt="2026-02-09T08:10:00.046"/>
   </p1510:revLst>
 </p1510:revInfo>
@@ -217,7 +218,7 @@
   <pc:docChgLst>
     <pc:chgData name="Zhao Jin" userId="cd05a825-544c-438a-9ba1-08e63db50b47" providerId="ADAL" clId="{5DF3A229-1965-414E-AF54-F4C37AC7DF68}"/>
     <pc:docChg chg="undo custSel modSld sldOrd">
-      <pc:chgData name="Zhao Jin" userId="cd05a825-544c-438a-9ba1-08e63db50b47" providerId="ADAL" clId="{5DF3A229-1965-414E-AF54-F4C37AC7DF68}" dt="2026-02-10T01:26:04.485" v="599" actId="6549"/>
+      <pc:chgData name="Zhao Jin" userId="cd05a825-544c-438a-9ba1-08e63db50b47" providerId="ADAL" clId="{5DF3A229-1965-414E-AF54-F4C37AC7DF68}" dt="2026-02-10T04:02:01.736" v="666" actId="20577"/>
       <pc:docMkLst>
         <pc:docMk/>
       </pc:docMkLst>
@@ -368,12 +369,50 @@
           </ac:spMkLst>
         </pc:spChg>
       </pc:sldChg>
+      <pc:sldChg chg="modSp mod">
+        <pc:chgData name="Zhao Jin" userId="cd05a825-544c-438a-9ba1-08e63db50b47" providerId="ADAL" clId="{5DF3A229-1965-414E-AF54-F4C37AC7DF68}" dt="2026-02-10T04:02:01.736" v="666" actId="20577"/>
+        <pc:sldMkLst>
+          <pc:docMk/>
+          <pc:sldMk cId="3922430229" sldId="580"/>
+        </pc:sldMkLst>
+        <pc:spChg chg="mod">
+          <ac:chgData name="Zhao Jin" userId="cd05a825-544c-438a-9ba1-08e63db50b47" providerId="ADAL" clId="{5DF3A229-1965-414E-AF54-F4C37AC7DF68}" dt="2026-02-10T04:02:01.736" v="666" actId="20577"/>
+          <ac:spMkLst>
+            <pc:docMk/>
+            <pc:sldMk cId="3922430229" sldId="580"/>
+            <ac:spMk id="11" creationId="{00000000-0000-0000-0000-000000000000}"/>
+          </ac:spMkLst>
+        </pc:spChg>
+      </pc:sldChg>
       <pc:sldChg chg="ord">
         <pc:chgData name="Zhao Jin" userId="cd05a825-544c-438a-9ba1-08e63db50b47" providerId="ADAL" clId="{5DF3A229-1965-414E-AF54-F4C37AC7DF68}" dt="2026-02-10T01:16:37.028" v="356"/>
         <pc:sldMkLst>
           <pc:docMk/>
           <pc:sldMk cId="1886636263" sldId="581"/>
         </pc:sldMkLst>
+      </pc:sldChg>
+      <pc:sldChg chg="addSp delSp modSp mod">
+        <pc:chgData name="Zhao Jin" userId="cd05a825-544c-438a-9ba1-08e63db50b47" providerId="ADAL" clId="{5DF3A229-1965-414E-AF54-F4C37AC7DF68}" dt="2026-02-10T04:00:42.595" v="664" actId="478"/>
+        <pc:sldMkLst>
+          <pc:docMk/>
+          <pc:sldMk cId="567798019" sldId="591"/>
+        </pc:sldMkLst>
+        <pc:spChg chg="add mod">
+          <ac:chgData name="Zhao Jin" userId="cd05a825-544c-438a-9ba1-08e63db50b47" providerId="ADAL" clId="{5DF3A229-1965-414E-AF54-F4C37AC7DF68}" dt="2026-02-10T04:00:32.870" v="661" actId="14100"/>
+          <ac:spMkLst>
+            <pc:docMk/>
+            <pc:sldMk cId="567798019" sldId="591"/>
+            <ac:spMk id="3" creationId="{27CC6888-6184-7223-2148-0E46FD439446}"/>
+          </ac:spMkLst>
+        </pc:spChg>
+        <pc:spChg chg="add del mod">
+          <ac:chgData name="Zhao Jin" userId="cd05a825-544c-438a-9ba1-08e63db50b47" providerId="ADAL" clId="{5DF3A229-1965-414E-AF54-F4C37AC7DF68}" dt="2026-02-10T04:00:42.595" v="664" actId="478"/>
+          <ac:spMkLst>
+            <pc:docMk/>
+            <pc:sldMk cId="567798019" sldId="591"/>
+            <ac:spMk id="5" creationId="{CF919BD2-D720-4864-479A-4EFC01D93C81}"/>
+          </ac:spMkLst>
+        </pc:spChg>
       </pc:sldChg>
       <pc:sldChg chg="modSp mod">
         <pc:chgData name="Zhao Jin" userId="cd05a825-544c-438a-9ba1-08e63db50b47" providerId="ADAL" clId="{5DF3A229-1965-414E-AF54-F4C37AC7DF68}" dt="2026-02-09T06:48:55.331" v="324" actId="207"/>
@@ -1289,7 +1328,7 @@
               <a:pPr>
                 <a:defRPr/>
               </a:pPr>
-              <a:t>2/9/2026</a:t>
+              <a:t>2/10/2026</a:t>
             </a:fld>
             <a:endParaRPr lang="en-US" dirty="0"/>
           </a:p>
@@ -15311,7 +15350,7 @@
                 <a:latin typeface="Courier New" panose="02070309020205020404" pitchFamily="49" charset="0"/>
                 <a:cs typeface="Courier New" panose="02070309020205020404" pitchFamily="49" charset="0"/>
               </a:rPr>
-              <a:t>	CS1010_print_long(a);</a:t>
+              <a:t>	cs1010_print_long(a);</a:t>
             </a:r>
           </a:p>
           <a:p>
@@ -35067,6 +35106,58 @@
             <a:r>
               <a:rPr lang="en-US" dirty="0"/>
               <a:t>CS1010: Programming Methodology</a:t>
+            </a:r>
+          </a:p>
+        </p:txBody>
+      </p:sp>
+      <p:sp>
+        <p:nvSpPr>
+          <p:cNvPr id="3" name="TextBox 2">
+            <a:extLst>
+              <a:ext uri="{FF2B5EF4-FFF2-40B4-BE49-F238E27FC236}">
+                <a16:creationId xmlns:a16="http://schemas.microsoft.com/office/drawing/2014/main" id="{27CC6888-6184-7223-2148-0E46FD439446}"/>
+              </a:ext>
+            </a:extLst>
+          </p:cNvPr>
+          <p:cNvSpPr txBox="1"/>
+          <p:nvPr/>
+        </p:nvSpPr>
+        <p:spPr>
+          <a:xfrm>
+            <a:off x="6293346" y="3820697"/>
+            <a:ext cx="1612404" cy="646331"/>
+          </a:xfrm>
+          <a:prstGeom prst="rect">
+            <a:avLst/>
+          </a:prstGeom>
+          <a:solidFill>
+            <a:srgbClr val="FFFF99"/>
+          </a:solidFill>
+          <a:ln w="12700"/>
+        </p:spPr>
+        <p:style>
+          <a:lnRef idx="2">
+            <a:schemeClr val="accent4"/>
+          </a:lnRef>
+          <a:fillRef idx="1">
+            <a:schemeClr val="lt1"/>
+          </a:fillRef>
+          <a:effectRef idx="0">
+            <a:schemeClr val="accent4"/>
+          </a:effectRef>
+          <a:fontRef idx="minor">
+            <a:schemeClr val="dk1"/>
+          </a:fontRef>
+        </p:style>
+        <p:txBody>
+          <a:bodyPr wrap="square" rtlCol="0">
+            <a:spAutoFit/>
+          </a:bodyPr>
+          <a:lstStyle/>
+          <a:p>
+            <a:r>
+              <a:rPr lang="en-US" dirty="0"/>
+              <a:t>Corner cases are tricky.</a:t>
             </a:r>
           </a:p>
         </p:txBody>
